--- a/docs/to-be/nl2sql-process-flow.pptx
+++ b/docs/to-be/nl2sql-process-flow.pptx
@@ -3468,7 +3468,7 @@
                 <a:latin typeface="맑은 고딕"/>
                 <a:ea typeface="맑은 고딕"/>
               </a:rPr>
-              <a:t>메타데이터 보강 (LLM 초안)</a:t>
+              <a:t>테이블 용도 · 코멘트 (사람)</a:t>
             </a:r>
           </a:p>
         </p:txBody>
@@ -3503,7 +3503,7 @@
                 <a:latin typeface="맑은 고딕"/>
                 <a:ea typeface="맑은 고딕"/>
               </a:rPr>
-              <a:t>테이블: 요약 카드 + 한 줄 요약</a:t>
+              <a:t>용도 한 줄이 테이블 추론에 쓰임</a:t>
             </a:r>
           </a:p>
           <a:p>
@@ -3515,7 +3515,7 @@
                 <a:latin typeface="맑은 고딕"/>
                 <a:ea typeface="맑은 고딕"/>
               </a:rPr>
-              <a:t>지표: 예시 질문 3~5개 · 동의어</a:t>
+              <a:t>코드값 뜻은 DB 컬럼 코멘트에</a:t>
             </a:r>
           </a:p>
           <a:p>
@@ -3527,7 +3527,7 @@
                 <a:latin typeface="맑은 고딕"/>
                 <a:ea typeface="맑은 고딕"/>
               </a:rPr>
-              <a:t>→ 사람 검수 대기</a:t>
+              <a:t>→ meta_table.purpose</a:t>
             </a:r>
           </a:p>
         </p:txBody>
@@ -3653,7 +3653,7 @@
                 <a:latin typeface="맑은 고딕"/>
                 <a:ea typeface="맑은 고딕"/>
               </a:rPr>
-              <a:t>사람 승인</a:t>
+              <a:t>저장하면 바로 사용</a:t>
             </a:r>
           </a:p>
         </p:txBody>
@@ -3688,7 +3688,7 @@
                 <a:latin typeface="맑은 고딕"/>
                 <a:ea typeface="맑은 고딕"/>
               </a:rPr>
-              <a:t>시스템 담당자 일괄 승인</a:t>
+              <a:t>깨지지 않은 지표는 저장 즉시</a:t>
             </a:r>
           </a:p>
           <a:p>
@@ -3700,7 +3700,7 @@
                 <a:latin typeface="맑은 고딕"/>
                 <a:ea typeface="맑은 고딕"/>
               </a:rPr>
-              <a:t>승인된 카드·예시만 질문에 쓰임</a:t>
+              <a:t>질문 처리 후보가 됨</a:t>
             </a:r>
           </a:p>
           <a:p>
@@ -4053,7 +4053,7 @@
                 <a:latin typeface="맑은 고딕"/>
                 <a:ea typeface="맑은 고딕"/>
               </a:rPr>
-              <a:t>보내는 것: 업무 영역 설명 + 시스템 테이블의 한 줄 요약 목록</a:t>
+              <a:t>보내는 것: 업무 영역 설명 + 테이블마다 용도(없으면 코멘트) 한 줄</a:t>
             </a:r>
           </a:p>
           <a:p>
@@ -4815,7 +4815,7 @@
                 <a:latin typeface="맑은 고딕"/>
                 <a:ea typeface="맑은 고딕"/>
               </a:rPr>
-              <a:t>보내는 것: 지표 이름 · 설명 · 예시 질문</a:t>
+              <a:t>보내는 것: 지표 이름 · 설명 · 같은 말</a:t>
             </a:r>
           </a:p>
           <a:p>
@@ -6704,7 +6704,7 @@
                 <a:latin typeface="맑은 고딕"/>
                 <a:ea typeface="맑은 고딕"/>
               </a:rPr>
-              <a:t>업무 영역 설명 · 시스템 테이블의 한 줄 요약 목록 · 질문 · 출력 형식(후보 + 이유)</a:t>
+              <a:t>업무 영역 설명 · 테이블마다 용도(없으면 코멘트) 한 줄 · 질문 · 출력 형식(후보 + 이유)</a:t>
             </a:r>
           </a:p>
         </p:txBody>
@@ -7028,7 +7028,7 @@
                 <a:latin typeface="맑은 고딕"/>
                 <a:ea typeface="맑은 고딕"/>
               </a:rPr>
-              <a:t>후보 지표의 이름 · 설명 · 예시 질문 1~2개 · 질문 · 업무 용어 사전(관련 항목만)</a:t>
+              <a:t>후보 지표의 이름 · 설명 · 같은 말 · 질문</a:t>
             </a:r>
           </a:p>
         </p:txBody>
@@ -7515,7 +7515,7 @@
                 <a:latin typeface="맑은 고딕"/>
                 <a:ea typeface="맑은 고딕"/>
               </a:rPr>
-              <a:t>1장의 질문 그대로. 지표 정의·컬럼·SQL 은 없다 — 이름·설명·예시 질문만 보고 고른다.</a:t>
+              <a:t>1장의 질문 그대로. 지표 정의·컬럼·SQL 은 없다 — 이름·설명·같은 말만 보고 고른다.</a:t>
             </a:r>
           </a:p>
         </p:txBody>
@@ -7666,7 +7666,7 @@
                 <a:latin typeface="Consolas"/>
                 <a:ea typeface="Consolas"/>
               </a:rPr>
-              <a:t>   예: "차량별 하루 운행 시간", "어제 엔진 몇 시간 돌았어"</a:t>
+              <a:t>   같은 말: 운행시간, 엔진 가동시간</a:t>
             </a:r>
           </a:p>
           <a:p>
@@ -7679,18 +7679,6 @@
                 <a:ea typeface="Consolas"/>
               </a:rPr>
               <a:t>2. 차량별 차량상태 상세정보 — 차량별 BMS 상태 수집 이력</a:t>
-            </a:r>
-          </a:p>
-          <a:p>
-            <a:r>
-              <a:rPr sz="860" b="0">
-                <a:solidFill>
-                  <a:srgbClr val="E5E9EE"/>
-                </a:solidFill>
-                <a:latin typeface="Consolas"/>
-                <a:ea typeface="Consolas"/>
-              </a:rPr>
-              <a:t>   예: "xxx 차량 7월 상태 일별로"</a:t>
             </a:r>
           </a:p>
           <a:p>
@@ -8128,7 +8116,7 @@
                 <a:latin typeface="맑은 고딕"/>
                 <a:ea typeface="맑은 고딕"/>
               </a:rPr>
-              <a:t>  실제 질문 로그가 없어 LLM 합성 + 담당자 작성 50개</a:t>
+              <a:t>  질문 기록에서 '맞음' 표시한 것을 파일로 내보내 쌓는다</a:t>
             </a:r>
           </a:p>
           <a:p>
@@ -8140,7 +8128,7 @@
                 <a:latin typeface="맑은 고딕"/>
                 <a:ea typeface="맑은 고딕"/>
               </a:rPr>
-              <a:t>  합성 질문은 지표 이름·설명의 단어를 피해 만든다</a:t>
+              <a:t>  evaluate.py 로 명령줄에서 실행 (화면 없음)</a:t>
             </a:r>
           </a:p>
           <a:p>
